--- a/template.pptx
+++ b/template.pptx
@@ -7120,7 +7120,7 @@
                 </a:solidFill>
                 <a:latin typeface="Calibri"/>
               </a:rPr>
-              <a:t>01</a:t>
+              <a:t>{{NUM_1}}</a:t>
             </a:r>
           </a:p>
         </p:txBody>
@@ -7190,7 +7190,7 @@
                 </a:solidFill>
                 <a:latin typeface="Calibri"/>
               </a:rPr>
-              <a:t>02</a:t>
+              <a:t>{{NUM_2}}</a:t>
             </a:r>
           </a:p>
         </p:txBody>
@@ -7260,7 +7260,7 @@
                 </a:solidFill>
                 <a:latin typeface="Calibri"/>
               </a:rPr>
-              <a:t>03</a:t>
+              <a:t>{{NUM_3}}</a:t>
             </a:r>
           </a:p>
         </p:txBody>
@@ -7330,7 +7330,7 @@
                 </a:solidFill>
                 <a:latin typeface="Calibri"/>
               </a:rPr>
-              <a:t>04</a:t>
+              <a:t>{{NUM_4}}</a:t>
             </a:r>
           </a:p>
         </p:txBody>
@@ -7400,7 +7400,7 @@
                 </a:solidFill>
                 <a:latin typeface="Calibri"/>
               </a:rPr>
-              <a:t>05</a:t>
+              <a:t>{{NUM_5}}</a:t>
             </a:r>
           </a:p>
         </p:txBody>
@@ -7470,7 +7470,7 @@
                 </a:solidFill>
                 <a:latin typeface="Calibri"/>
               </a:rPr>
-              <a:t>06</a:t>
+              <a:t>{{NUM_6}}</a:t>
             </a:r>
           </a:p>
         </p:txBody>
@@ -7540,7 +7540,7 @@
                 </a:solidFill>
                 <a:latin typeface="Calibri"/>
               </a:rPr>
-              <a:t>07</a:t>
+              <a:t>{{NUM_7}}</a:t>
             </a:r>
           </a:p>
         </p:txBody>
@@ -7610,7 +7610,7 @@
                 </a:solidFill>
                 <a:latin typeface="Calibri"/>
               </a:rPr>
-              <a:t>08</a:t>
+              <a:t>{{NUM_8}}</a:t>
             </a:r>
           </a:p>
         </p:txBody>
@@ -7680,7 +7680,7 @@
                 </a:solidFill>
                 <a:latin typeface="Calibri"/>
               </a:rPr>
-              <a:t>09</a:t>
+              <a:t>{{NUM_9}}</a:t>
             </a:r>
           </a:p>
         </p:txBody>
@@ -7750,7 +7750,7 @@
                 </a:solidFill>
                 <a:latin typeface="Calibri"/>
               </a:rPr>
-              <a:t>10</a:t>
+              <a:t>{{NUM_10}}</a:t>
             </a:r>
           </a:p>
         </p:txBody>
